--- a/curso/pptx/S61.pptx
+++ b/curso/pptx/S61.pptx
@@ -5233,7 +5233,7 @@
                 </a:solidFill>
                 <a:latin typeface="Nunito Sans"/>
               </a:rPr>
-              <a:t>Es una buena meta, pero no la única</a:t>
+              <a:t>这是个好目标，但不是唯一的目标</a:t>
             </a:r>
           </a:p>
           <a:p>
@@ -5258,7 +5258,7 @@
                 </a:solidFill>
                 <a:latin typeface="Nunito Sans"/>
               </a:rPr>
-              <a:t>Llega por las razones, no por cansancio</a:t>
+              <a:t>它是因为理由而达成的，不是因为累了</a:t>
             </a:r>
           </a:p>
           <a:p>
@@ -5283,7 +5283,7 @@
                 </a:solidFill>
                 <a:latin typeface="Nunito Sans"/>
               </a:rPr>
-              <a:t>Decir «vale» para que te dejen en paz no es consenso</a:t>
+              <a:t>为了让别人不再烦你而说“行吧”，不是共识</a:t>
             </a:r>
           </a:p>
         </p:txBody>
@@ -7077,7 +7077,7 @@
                 </a:solidFill>
                 <a:latin typeface="Nunito Sans"/>
               </a:rPr>
-              <a:t>El rival es la </a:t>
+              <a:t>对手是</a:t>
             </a:r>
             <a:r>
               <a:rPr sz="2800" b="1">
@@ -7086,7 +7086,7 @@
                 </a:solidFill>
                 <a:latin typeface="Nunito Sans"/>
               </a:rPr>
-              <a:t>pregunta</a:t>
+              <a:t>问题</a:t>
             </a:r>
             <a:r>
               <a:rPr sz="2800" b="0">
@@ -7095,7 +7095,7 @@
                 </a:solidFill>
                 <a:latin typeface="Nunito Sans"/>
               </a:rPr>
-              <a:t>, no la otra persona</a:t>
+              <a:t>，不是另一个人</a:t>
             </a:r>
           </a:p>
           <a:p>
@@ -7120,7 +7120,7 @@
                 </a:solidFill>
                 <a:latin typeface="Nunito Sans"/>
               </a:rPr>
-              <a:t>Las ideas se </a:t>
+              <a:t>想法在</a:t>
             </a:r>
             <a:r>
               <a:rPr sz="2800" b="1">
@@ -7129,7 +7129,7 @@
                 </a:solidFill>
                 <a:latin typeface="Nunito Sans"/>
               </a:rPr>
-              <a:t>mueven</a:t>
+              <a:t>流动</a:t>
             </a:r>
             <a:r>
               <a:rPr sz="2800" b="0">
@@ -7138,7 +7138,7 @@
                 </a:solidFill>
                 <a:latin typeface="Nunito Sans"/>
               </a:rPr>
-              <a:t>: se añaden y se corrigen</a:t>
+              <a:t>：被补充，被修正</a:t>
             </a:r>
           </a:p>
           <a:p>
@@ -7163,7 +7163,7 @@
                 </a:solidFill>
                 <a:latin typeface="Nunito Sans"/>
               </a:rPr>
-              <a:t>Aunque no haya acuerdo, sales entendiendo </a:t>
+              <a:t>即使没有达成一致，你也会</a:t>
             </a:r>
             <a:r>
               <a:rPr sz="2800" b="1">
@@ -7172,7 +7172,16 @@
                 </a:solidFill>
                 <a:latin typeface="Nunito Sans"/>
               </a:rPr>
-              <a:t>más</a:t>
+              <a:t>更</a:t>
+            </a:r>
+            <a:r>
+              <a:rPr sz="2800" b="0">
+                <a:solidFill>
+                  <a:srgbClr val="1F2A44"/>
+                </a:solidFill>
+                <a:latin typeface="Nunito Sans"/>
+              </a:rPr>
+              <a:t>明白</a:t>
             </a:r>
           </a:p>
         </p:txBody>
@@ -7809,7 +7818,7 @@
                 </a:solidFill>
                 <a:latin typeface="Nunito Sans"/>
               </a:rPr>
-              <a:t>El otro es un rival</a:t>
+              <a:t>对方是对手</a:t>
             </a:r>
           </a:p>
           <a:p>
@@ -7834,7 +7843,7 @@
                 </a:solidFill>
                 <a:latin typeface="Nunito Sans"/>
               </a:rPr>
-              <a:t>Solo cuenta mi idea</a:t>
+              <a:t>只有我的想法算数</a:t>
             </a:r>
           </a:p>
           <a:p>
@@ -7859,7 +7868,7 @@
                 </a:solidFill>
                 <a:latin typeface="Nunito Sans"/>
               </a:rPr>
-              <a:t>Escucho para contestar rápido</a:t>
+              <a:t>我听，是为了快点回答</a:t>
             </a:r>
           </a:p>
         </p:txBody>
@@ -7989,7 +7998,7 @@
                 </a:solidFill>
                 <a:latin typeface="Nunito Sans"/>
               </a:rPr>
-              <a:t>El otro me ayuda a pensar</a:t>
+              <a:t>对方在帮助我思考</a:t>
             </a:r>
           </a:p>
           <a:p>
@@ -8014,7 +8023,7 @@
                 </a:solidFill>
                 <a:latin typeface="Nunito Sans"/>
               </a:rPr>
-              <a:t>Cuentan las razones de los dos</a:t>
+              <a:t>两个人的理由都算数</a:t>
             </a:r>
           </a:p>
           <a:p>
@@ -8039,7 +8048,7 @@
                 </a:solidFill>
                 <a:latin typeface="Nunito Sans"/>
               </a:rPr>
-              <a:t>Escucho para entender</a:t>
+              <a:t>我听，是为了理解</a:t>
             </a:r>
           </a:p>
         </p:txBody>

--- a/curso/pptx/S61.pptx
+++ b/curso/pptx/S61.pptx
@@ -4129,7 +4129,7 @@
                 </a:solidFill>
                 <a:latin typeface="Nunito Sans"/>
               </a:rPr>
-              <a:t>伊克尔：“作业能帮助复习。你为什么认为不是呢？”娜亚拉：“我在家既没有时间，也没有安静的地方。”伊克尔：“好吧。如果作业是自愿的呢？”</a:t>
+              <a:t>一个男孩：“作业能帮助复习。你为什么认为不是呢？”一个女孩：“我在家既没有时间，也没有安静的地方。”这个男孩：“好吧。如果作业是自愿的呢？”</a:t>
             </a:r>
           </a:p>
         </p:txBody>
@@ -4202,7 +4202,7 @@
                 </a:solidFill>
                 <a:latin typeface="Nunito Sans"/>
               </a:rPr>
-              <a:t>他们互相倾听吗？是的：伊克尔问了娜亚拉的理由，并把它考虑进去。</a:t>
+              <a:t>他们互相倾听吗？是的：这个男孩问了这个女孩的理由，并把它考虑进去。</a:t>
             </a:r>
           </a:p>
           <a:p>
@@ -4438,7 +4438,7 @@
                 </a:solidFill>
                 <a:latin typeface="Nunito Sans"/>
               </a:rPr>
-              <a:t>奥马尔：“我们在阿雷纳尔（Arenal）碰面。”迈亚伦：“最好在莫尤阿（Moyúa）。”奥马尔：“不行，就在阿雷纳尔。”迈亚伦：“莫尤阿，就这么定了。”就这样，四十条消息。</a:t>
+              <a:t>一个男孩：“我们在阿雷纳尔（Arenal）碰面。”一个女孩：“最好在莫尤阿（Moyúa）。”这个男孩：“不行，就在阿雷纳尔。”这个女孩：“莫尤阿，就这么定了。”就这样，四十条消息。</a:t>
             </a:r>
           </a:p>
         </p:txBody>
@@ -4747,7 +4747,7 @@
                 </a:solidFill>
                 <a:latin typeface="Nunito Sans"/>
               </a:rPr>
-              <a:t>雅斯敏和迪伦谈论校服。他们互相倾听，给出理由，还发现了新东西。最后他们仍然意见不一致。</a:t>
+              <a:t>一个女孩和一个男孩谈论校服。他们互相倾听，给出理由，还发现了新东西。最后他们仍然意见不一致。</a:t>
             </a:r>
           </a:p>
         </p:txBody>
